--- a/reports/files/Bitcoin vs Gold - monthly analysis.pptx
+++ b/reports/files/Bitcoin vs Gold - monthly analysis.pptx
@@ -6627,7 +6627,7 @@
                   <a:srgbClr val="333333"/>
                 </a:solidFill>
               </a:rPr>
-              <a:t>Measure full‑period correlation with 95% CI
+              <a:t>Measure full‑period correlation with  95% confidence interval (CI)
 Examine time‑varying correlation via 6‑ and 12‑month rolling windows
 Compare correlations across sub‑periods (2020–2021, 2022–2023, 2024–2025)
 Assess robustness using Spearman, bootstrap CI, winsorization &amp; jackknife</a:t>
